--- a/docs/test/stress/m2-challenger-output/a02_13chars.pptx
+++ b/docs/test/stress/m2-challenger-output/a02_13chars.pptx
@@ -1244,7 +1244,7 @@
               <a:buNone/>
             </a:pPr>
             <a:r>
-              <a:rPr lang="en-US" sz="950" dirty="0">
+              <a:rPr lang="en-US" sz="850" dirty="0">
                 <a:solidFill>
                   <a:srgbClr val="7A8794"/>
                 </a:solidFill>
@@ -1252,9 +1252,9 @@
                 <a:ea typeface="맑은 고딕" pitchFamily="34" charset="-122"/>
                 <a:cs typeface="맑은 고딕" pitchFamily="34" charset="-120"/>
               </a:rPr>
-              <a:t>필요 실투자금</a:t>
-            </a:r>
-            <a:endParaRPr lang="en-US" sz="950" dirty="0"/>
+              <a:t>실투자금 (취득비용 포함)</a:t>
+            </a:r>
+            <a:endParaRPr lang="en-US" sz="850" dirty="0"/>
           </a:p>
         </p:txBody>
       </p:sp>
@@ -1364,7 +1364,7 @@
                 <a:ea typeface="맑은 고딕" pitchFamily="34" charset="-122"/>
                 <a:cs typeface="맑은 고딕" pitchFamily="34" charset="-120"/>
               </a:rPr>
-              <a:t>연 수익률(Cap Rate</a:t>
+              <a:t>Cap Rate (NOI 기준)</a:t>
             </a:r>
             <a:endParaRPr lang="en-US" sz="850" dirty="0"/>
           </a:p>
@@ -1408,7 +1408,7 @@
                 <a:ea typeface="Arial" pitchFamily="34" charset="-122"/>
                 <a:cs typeface="Arial" pitchFamily="34" charset="-120"/>
               </a:rPr>
-              <a:t>4.2%</a:t>
+              <a:t>4.20%</a:t>
             </a:r>
             <a:endParaRPr lang="en-US" sz="2200" dirty="0"/>
           </a:p>
@@ -1416,7 +1416,51 @@
       </p:sp>
       <p:sp>
         <p:nvSpPr>
-          <p:cNvPr id="17" name="Shape 15"/>
+          <p:cNvPr id="17" name="Text 15"/>
+          <p:cNvSpPr/>
+          <p:nvPr/>
+        </p:nvSpPr>
+        <p:spPr>
+          <a:xfrm>
+            <a:off x="8213141" y="2404491"/>
+            <a:ext cx="3247034" cy="219456"/>
+          </a:xfrm>
+          <a:prstGeom prst="rect">
+            <a:avLst/>
+          </a:prstGeom>
+          <a:noFill/>
+          <a:ln/>
+        </p:spPr>
+        <p:txBody>
+          <a:bodyPr wrap="square" lIns="0" tIns="0" rIns="0" bIns="0" rtlCol="0" anchor="ctr">
+            <a:normAutofit/>
+          </a:bodyPr>
+          <a:lstStyle/>
+          <a:p>
+            <a:pPr indent="0" marL="0">
+              <a:lnSpc>
+                <a:spcPct val="115000"/>
+              </a:lnSpc>
+              <a:buNone/>
+            </a:pPr>
+            <a:r>
+              <a:rPr lang="en-US" sz="880" dirty="0">
+                <a:solidFill>
+                  <a:srgbClr val="7A8794"/>
+                </a:solidFill>
+                <a:latin typeface="맑은 고딕" pitchFamily="34" charset="0"/>
+                <a:ea typeface="맑은 고딕" pitchFamily="34" charset="-122"/>
+                <a:cs typeface="맑은 고딕" pitchFamily="34" charset="-120"/>
+              </a:rPr>
+              <a:t>운영비·공실충당 차감 후</a:t>
+            </a:r>
+            <a:endParaRPr lang="en-US" sz="880" dirty="0"/>
+          </a:p>
+        </p:txBody>
+      </p:sp>
+      <p:sp>
+        <p:nvSpPr>
+          <p:cNvPr id="18" name="Shape 16"/>
           <p:cNvSpPr/>
           <p:nvPr/>
         </p:nvSpPr>
@@ -1443,7 +1487,7 @@
       </p:sp>
       <p:sp>
         <p:nvSpPr>
-          <p:cNvPr id="18" name="Text 16"/>
+          <p:cNvPr id="19" name="Text 17"/>
           <p:cNvSpPr/>
           <p:nvPr/>
         </p:nvSpPr>
@@ -1484,7 +1528,7 @@
       </p:sp>
       <p:sp>
         <p:nvSpPr>
-          <p:cNvPr id="19" name="Text 17"/>
+          <p:cNvPr id="20" name="Text 18"/>
           <p:cNvSpPr/>
           <p:nvPr/>
         </p:nvSpPr>
@@ -1528,7 +1572,7 @@
       </p:sp>
       <p:sp>
         <p:nvSpPr>
-          <p:cNvPr id="20" name="Shape 18"/>
+          <p:cNvPr id="21" name="Shape 19"/>
           <p:cNvSpPr/>
           <p:nvPr/>
         </p:nvSpPr>
@@ -1555,7 +1599,7 @@
       </p:sp>
       <p:sp>
         <p:nvSpPr>
-          <p:cNvPr id="21" name="Text 19"/>
+          <p:cNvPr id="22" name="Text 20"/>
           <p:cNvSpPr/>
           <p:nvPr/>
         </p:nvSpPr>
@@ -1596,7 +1640,7 @@
       </p:sp>
       <p:sp>
         <p:nvSpPr>
-          <p:cNvPr id="22" name="Text 20"/>
+          <p:cNvPr id="23" name="Text 21"/>
           <p:cNvSpPr/>
           <p:nvPr/>
         </p:nvSpPr>
@@ -1640,7 +1684,7 @@
       </p:sp>
       <p:sp>
         <p:nvSpPr>
-          <p:cNvPr id="23" name="Shape 21"/>
+          <p:cNvPr id="24" name="Shape 22"/>
           <p:cNvSpPr/>
           <p:nvPr/>
         </p:nvSpPr>
@@ -1667,7 +1711,7 @@
       </p:sp>
       <p:sp>
         <p:nvSpPr>
-          <p:cNvPr id="24" name="Text 22"/>
+          <p:cNvPr id="25" name="Text 23"/>
           <p:cNvSpPr/>
           <p:nvPr/>
         </p:nvSpPr>
@@ -1708,7 +1752,7 @@
       </p:sp>
       <p:sp>
         <p:nvSpPr>
-          <p:cNvPr id="25" name="Text 23"/>
+          <p:cNvPr id="26" name="Text 24"/>
           <p:cNvSpPr/>
           <p:nvPr/>
         </p:nvSpPr>
@@ -1752,7 +1796,7 @@
       </p:sp>
       <p:sp>
         <p:nvSpPr>
-          <p:cNvPr id="26" name="Text 24"/>
+          <p:cNvPr id="27" name="Text 25"/>
           <p:cNvSpPr/>
           <p:nvPr/>
         </p:nvSpPr>
@@ -1791,18 +1835,18 @@
       </p:sp>
       <p:sp>
         <p:nvSpPr>
-          <p:cNvPr id="27" name="Shape 25"/>
+          <p:cNvPr id="28" name="Shape 26"/>
           <p:cNvSpPr/>
           <p:nvPr/>
         </p:nvSpPr>
         <p:spPr>
           <a:xfrm>
             <a:off x="566928" y="4288155"/>
-            <a:ext cx="11057839" cy="512191"/>
+            <a:ext cx="11057839" cy="640080"/>
           </a:xfrm>
           <a:prstGeom prst="roundRect">
             <a:avLst>
-              <a:gd name="adj" fmla="val 8926"/>
+              <a:gd name="adj" fmla="val 7143"/>
             </a:avLst>
           </a:prstGeom>
           <a:solidFill>
@@ -1818,13 +1862,13 @@
       </p:sp>
       <p:sp>
         <p:nvSpPr>
-          <p:cNvPr id="28" name="Shape 26"/>
-          <p:cNvSpPr/>
-          <p:nvPr/>
-        </p:nvSpPr>
-        <p:spPr>
-          <a:xfrm>
-            <a:off x="676656" y="4361371"/>
+          <p:cNvPr id="29" name="Shape 27"/>
+          <p:cNvSpPr/>
+          <p:nvPr/>
+        </p:nvSpPr>
+        <p:spPr>
+          <a:xfrm>
+            <a:off x="676656" y="4425315"/>
             <a:ext cx="411480" cy="365760"/>
           </a:xfrm>
           <a:prstGeom prst="roundRect">
@@ -1845,13 +1889,13 @@
       </p:sp>
       <p:sp>
         <p:nvSpPr>
-          <p:cNvPr id="29" name="Text 27"/>
-          <p:cNvSpPr/>
-          <p:nvPr/>
-        </p:nvSpPr>
-        <p:spPr>
-          <a:xfrm>
-            <a:off x="676656" y="4361371"/>
+          <p:cNvPr id="30" name="Text 28"/>
+          <p:cNvSpPr/>
+          <p:nvPr/>
+        </p:nvSpPr>
+        <p:spPr>
+          <a:xfrm>
+            <a:off x="676656" y="4425315"/>
             <a:ext cx="411480" cy="365760"/>
           </a:xfrm>
           <a:prstGeom prst="rect">
@@ -1884,14 +1928,14 @@
       </p:sp>
       <p:sp>
         <p:nvSpPr>
-          <p:cNvPr id="30" name="Text 28"/>
+          <p:cNvPr id="31" name="Text 29"/>
           <p:cNvSpPr/>
           <p:nvPr/>
         </p:nvSpPr>
         <p:spPr>
           <a:xfrm>
             <a:off x="1207008" y="4324731"/>
-            <a:ext cx="10280599" cy="439039"/>
+            <a:ext cx="10280599" cy="566928"/>
           </a:xfrm>
           <a:prstGeom prst="rect">
             <a:avLst/>
@@ -1900,7 +1944,9 @@
           <a:ln/>
         </p:spPr>
         <p:txBody>
-          <a:bodyPr wrap="square" lIns="0" tIns="0" rIns="0" bIns="0" rtlCol="0" anchor="ctr"/>
+          <a:bodyPr wrap="square" lIns="0" tIns="0" rIns="0" bIns="0" rtlCol="0" anchor="ctr">
+            <a:normAutofit/>
+          </a:bodyPr>
           <a:lstStyle/>
           <a:p>
             <a:pPr indent="0" marL="0">
@@ -1915,7 +1961,7 @@
                 <a:ea typeface="맑은 고딕" pitchFamily="34" charset="-122"/>
                 <a:cs typeface="맑은 고딕" pitchFamily="34" charset="-120"/>
               </a:rPr>
-              <a:t>입지 가치: 대중교통 역세권 입지, 도심 비즈니스 권역 업무·상업 중심지 배후 수요 확보</a:t>
+              <a:t>수익률 — 연 순수익률(Cap Rate) 4.2%</a:t>
             </a:r>
             <a:endParaRPr lang="en-US" sz="1150" dirty="0"/>
           </a:p>
@@ -1923,18 +1969,18 @@
       </p:sp>
       <p:sp>
         <p:nvSpPr>
-          <p:cNvPr id="31" name="Shape 29"/>
-          <p:cNvSpPr/>
-          <p:nvPr/>
-        </p:nvSpPr>
-        <p:spPr>
-          <a:xfrm>
-            <a:off x="566928" y="4882642"/>
-            <a:ext cx="11057839" cy="512191"/>
+          <p:cNvPr id="32" name="Shape 30"/>
+          <p:cNvSpPr/>
+          <p:nvPr/>
+        </p:nvSpPr>
+        <p:spPr>
+          <a:xfrm>
+            <a:off x="566928" y="5037963"/>
+            <a:ext cx="11057839" cy="640080"/>
           </a:xfrm>
           <a:prstGeom prst="roundRect">
             <a:avLst>
-              <a:gd name="adj" fmla="val 8926"/>
+              <a:gd name="adj" fmla="val 7143"/>
             </a:avLst>
           </a:prstGeom>
           <a:solidFill>
@@ -1950,13 +1996,13 @@
       </p:sp>
       <p:sp>
         <p:nvSpPr>
-          <p:cNvPr id="32" name="Shape 30"/>
-          <p:cNvSpPr/>
-          <p:nvPr/>
-        </p:nvSpPr>
-        <p:spPr>
-          <a:xfrm>
-            <a:off x="676656" y="4955858"/>
+          <p:cNvPr id="33" name="Shape 31"/>
+          <p:cNvSpPr/>
+          <p:nvPr/>
+        </p:nvSpPr>
+        <p:spPr>
+          <a:xfrm>
+            <a:off x="676656" y="5175123"/>
             <a:ext cx="411480" cy="365760"/>
           </a:xfrm>
           <a:prstGeom prst="roundRect">
@@ -1977,13 +2023,13 @@
       </p:sp>
       <p:sp>
         <p:nvSpPr>
-          <p:cNvPr id="33" name="Text 31"/>
-          <p:cNvSpPr/>
-          <p:nvPr/>
-        </p:nvSpPr>
-        <p:spPr>
-          <a:xfrm>
-            <a:off x="676656" y="4955858"/>
+          <p:cNvPr id="34" name="Text 32"/>
+          <p:cNvSpPr/>
+          <p:nvPr/>
+        </p:nvSpPr>
+        <p:spPr>
+          <a:xfrm>
+            <a:off x="676656" y="5175123"/>
             <a:ext cx="411480" cy="365760"/>
           </a:xfrm>
           <a:prstGeom prst="rect">
@@ -2016,14 +2062,14 @@
       </p:sp>
       <p:sp>
         <p:nvSpPr>
-          <p:cNvPr id="34" name="Text 32"/>
-          <p:cNvSpPr/>
-          <p:nvPr/>
-        </p:nvSpPr>
-        <p:spPr>
-          <a:xfrm>
-            <a:off x="1207008" y="4919218"/>
-            <a:ext cx="10280599" cy="439039"/>
+          <p:cNvPr id="35" name="Text 33"/>
+          <p:cNvSpPr/>
+          <p:nvPr/>
+        </p:nvSpPr>
+        <p:spPr>
+          <a:xfrm>
+            <a:off x="1207008" y="5074539"/>
+            <a:ext cx="10280599" cy="566928"/>
           </a:xfrm>
           <a:prstGeom prst="rect">
             <a:avLst/>
@@ -2032,7 +2078,9 @@
           <a:ln/>
         </p:spPr>
         <p:txBody>
-          <a:bodyPr wrap="square" lIns="0" tIns="0" rIns="0" bIns="0" rtlCol="0" anchor="ctr"/>
+          <a:bodyPr wrap="square" lIns="0" tIns="0" rIns="0" bIns="0" rtlCol="0" anchor="ctr">
+            <a:normAutofit/>
+          </a:bodyPr>
           <a:lstStyle/>
           <a:p>
             <a:pPr indent="0" marL="0">
@@ -2047,7 +2095,7 @@
                 <a:ea typeface="맑은 고딕" pitchFamily="34" charset="-122"/>
                 <a:cs typeface="맑은 고딕" pitchFamily="34" charset="-120"/>
               </a:rPr>
-              <a:t>수익 안정성: 연 순수익률(Cap Rate) 4.2% 기반 안정적 임대수익 자산</a:t>
+              <a:t>자산 규모 — 대지 180평·연면적 850평</a:t>
             </a:r>
             <a:endParaRPr lang="en-US" sz="1150" dirty="0"/>
           </a:p>
@@ -2055,139 +2103,7 @@
       </p:sp>
       <p:sp>
         <p:nvSpPr>
-          <p:cNvPr id="35" name="Shape 33"/>
-          <p:cNvSpPr/>
-          <p:nvPr/>
-        </p:nvSpPr>
-        <p:spPr>
-          <a:xfrm>
-            <a:off x="566928" y="5477129"/>
-            <a:ext cx="11057839" cy="512191"/>
-          </a:xfrm>
-          <a:prstGeom prst="roundRect">
-            <a:avLst>
-              <a:gd name="adj" fmla="val 8926"/>
-            </a:avLst>
-          </a:prstGeom>
-          <a:solidFill>
-            <a:srgbClr val="F8F9FA"/>
-          </a:solidFill>
-          <a:ln w="7620">
-            <a:solidFill>
-              <a:srgbClr val="E2E8F0"/>
-            </a:solidFill>
-            <a:prstDash val="solid"/>
-          </a:ln>
-        </p:spPr>
-      </p:sp>
-      <p:sp>
-        <p:nvSpPr>
-          <p:cNvPr id="36" name="Shape 34"/>
-          <p:cNvSpPr/>
-          <p:nvPr/>
-        </p:nvSpPr>
-        <p:spPr>
-          <a:xfrm>
-            <a:off x="676656" y="5550345"/>
-            <a:ext cx="411480" cy="365760"/>
-          </a:xfrm>
-          <a:prstGeom prst="roundRect">
-            <a:avLst>
-              <a:gd name="adj" fmla="val 10000"/>
-            </a:avLst>
-          </a:prstGeom>
-          <a:solidFill>
-            <a:srgbClr val="FBF6EC"/>
-          </a:solidFill>
-          <a:ln w="6350">
-            <a:solidFill>
-              <a:srgbClr val="F2E7CF"/>
-            </a:solidFill>
-            <a:prstDash val="solid"/>
-          </a:ln>
-        </p:spPr>
-      </p:sp>
-      <p:sp>
-        <p:nvSpPr>
-          <p:cNvPr id="37" name="Text 35"/>
-          <p:cNvSpPr/>
-          <p:nvPr/>
-        </p:nvSpPr>
-        <p:spPr>
-          <a:xfrm>
-            <a:off x="676656" y="5550345"/>
-            <a:ext cx="411480" cy="365760"/>
-          </a:xfrm>
-          <a:prstGeom prst="rect">
-            <a:avLst/>
-          </a:prstGeom>
-          <a:noFill/>
-          <a:ln/>
-        </p:spPr>
-        <p:txBody>
-          <a:bodyPr wrap="square" lIns="0" tIns="0" rIns="0" bIns="0" rtlCol="0" anchor="ctr"/>
-          <a:lstStyle/>
-          <a:p>
-            <a:pPr algn="ctr" indent="0" marL="0">
-              <a:buNone/>
-            </a:pPr>
-            <a:r>
-              <a:rPr lang="en-US" sz="1000" b="1" dirty="0">
-                <a:solidFill>
-                  <a:srgbClr val="8E6A20"/>
-                </a:solidFill>
-                <a:latin typeface="Arial" pitchFamily="34" charset="0"/>
-                <a:ea typeface="Arial" pitchFamily="34" charset="-122"/>
-                <a:cs typeface="Arial" pitchFamily="34" charset="-120"/>
-              </a:rPr>
-              <a:t>03</a:t>
-            </a:r>
-            <a:endParaRPr lang="en-US" sz="1000" dirty="0"/>
-          </a:p>
-        </p:txBody>
-      </p:sp>
-      <p:sp>
-        <p:nvSpPr>
-          <p:cNvPr id="38" name="Text 36"/>
-          <p:cNvSpPr/>
-          <p:nvPr/>
-        </p:nvSpPr>
-        <p:spPr>
-          <a:xfrm>
-            <a:off x="1207008" y="5513705"/>
-            <a:ext cx="10280599" cy="439039"/>
-          </a:xfrm>
-          <a:prstGeom prst="rect">
-            <a:avLst/>
-          </a:prstGeom>
-          <a:noFill/>
-          <a:ln/>
-        </p:spPr>
-        <p:txBody>
-          <a:bodyPr wrap="square" lIns="0" tIns="0" rIns="0" bIns="0" rtlCol="0" anchor="ctr"/>
-          <a:lstStyle/>
-          <a:p>
-            <a:pPr indent="0" marL="0">
-              <a:buNone/>
-            </a:pPr>
-            <a:r>
-              <a:rPr lang="en-US" sz="1150" dirty="0">
-                <a:solidFill>
-                  <a:srgbClr val="10161F"/>
-                </a:solidFill>
-                <a:latin typeface="맑은 고딕" pitchFamily="34" charset="0"/>
-                <a:ea typeface="맑은 고딕" pitchFamily="34" charset="-122"/>
-                <a:cs typeface="맑은 고딕" pitchFamily="34" charset="-120"/>
-              </a:rPr>
-              <a:t>자산 규모: 대지 180평·연면적 850평 규모 단독 빌딩</a:t>
-            </a:r>
-            <a:endParaRPr lang="en-US" sz="1150" dirty="0"/>
-          </a:p>
-        </p:txBody>
-      </p:sp>
-      <p:sp>
-        <p:nvSpPr>
-          <p:cNvPr id="39" name="Text 37"/>
+          <p:cNvPr id="36" name="Text 34"/>
           <p:cNvSpPr/>
           <p:nvPr/>
         </p:nvSpPr>
@@ -2226,7 +2142,7 @@
       </p:sp>
       <p:sp>
         <p:nvSpPr>
-          <p:cNvPr id="40" name="Text 38"/>
+          <p:cNvPr id="37" name="Text 35"/>
           <p:cNvSpPr/>
           <p:nvPr/>
         </p:nvSpPr>
